--- a/Java_Week12_CRUD_Database.pptx
+++ b/Java_Week12_CRUD_Database.pptx
@@ -6,10 +6,10 @@
     <p:sldMasterId id="2147483796" r:id="rId2"/>
   </p:sldMasterIdLst>
   <p:notesMasterIdLst>
-    <p:notesMasterId r:id="rId16"/>
+    <p:notesMasterId r:id="rId24"/>
   </p:notesMasterIdLst>
   <p:handoutMasterIdLst>
-    <p:handoutMasterId r:id="rId17"/>
+    <p:handoutMasterId r:id="rId25"/>
   </p:handoutMasterIdLst>
   <p:sldIdLst>
     <p:sldId id="689" r:id="rId3"/>
@@ -25,6 +25,14 @@
     <p:sldId id="698" r:id="rId13"/>
     <p:sldId id="699" r:id="rId14"/>
     <p:sldId id="700" r:id="rId15"/>
+    <p:sldId id="701" r:id="rId16"/>
+    <p:sldId id="702" r:id="rId17"/>
+    <p:sldId id="703" r:id="rId18"/>
+    <p:sldId id="704" r:id="rId19"/>
+    <p:sldId id="705" r:id="rId20"/>
+    <p:sldId id="706" r:id="rId21"/>
+    <p:sldId id="707" r:id="rId22"/>
+    <p:sldId id="708" r:id="rId23"/>
   </p:sldIdLst>
   <p:sldSz cx="9906000" cy="6858000" type="A4"/>
   <p:notesSz cx="7104063" cy="10234613"/>
@@ -6752,6 +6760,1306 @@
 </p:sld>
 </file>
 
+<file path=ppt/slides/slide14.xml><?xml version="1.0" encoding="utf-8"?>
+<p:sld xmlns:a="http://schemas.openxmlformats.org/drawingml/2006/main" xmlns:r="http://schemas.openxmlformats.org/officeDocument/2006/relationships" xmlns:p="http://schemas.openxmlformats.org/presentationml/2006/main">
+  <p:cSld>
+    <p:spTree>
+      <p:nvGrpSpPr>
+        <p:cNvPr id="1" name=""/>
+        <p:cNvGrpSpPr/>
+        <p:nvPr/>
+      </p:nvGrpSpPr>
+      <p:grpSpPr>
+        <a:xfrm>
+          <a:off x="0" y="0"/>
+          <a:ext cx="0" cy="0"/>
+          <a:chOff x="0" y="0"/>
+          <a:chExt cx="0" cy="0"/>
+        </a:xfrm>
+      </p:grpSpPr>
+      <p:sp>
+        <p:nvSpPr>
+          <p:cNvPr id="2" name="Title 1">
+            <a:extLst>
+              <a:ext uri="{FF2B5EF4-FFF2-40B4-BE49-F238E27FC236}">
+                <a16:creationId xmlns:a16="http://schemas.microsoft.com/office/drawing/2014/main" id="{57B180A9-A75B-93FD-EBE6-5092EC83D3C0}"/>
+              </a:ext>
+            </a:extLst>
+          </p:cNvPr>
+          <p:cNvSpPr>
+            <a:spLocks noGrp="1"/>
+          </p:cNvSpPr>
+          <p:nvPr>
+            <p:ph type="title"/>
+          </p:nvPr>
+        </p:nvSpPr>
+        <p:spPr/>
+        <p:txBody>
+          <a:bodyPr>
+            <a:normAutofit fontScale="90000"/>
+          </a:bodyPr>
+          <a:lstStyle/>
+          <a:p>
+            <a:r>
+              <a:rPr lang="ja-JP" altLang="ja-JP" b="1" dirty="0"/>
+              <a:t>Generate</a:t>
+            </a:r>
+            <a:endParaRPr kumimoji="1" lang="ja-JP" altLang="en-US" dirty="0"/>
+          </a:p>
+        </p:txBody>
+      </p:sp>
+      <p:sp>
+        <p:nvSpPr>
+          <p:cNvPr id="3" name="Content Placeholder 2">
+            <a:extLst>
+              <a:ext uri="{FF2B5EF4-FFF2-40B4-BE49-F238E27FC236}">
+                <a16:creationId xmlns:a16="http://schemas.microsoft.com/office/drawing/2014/main" id="{DE7718A8-7AE6-7621-606D-8F71FBA8AD2C}"/>
+              </a:ext>
+            </a:extLst>
+          </p:cNvPr>
+          <p:cNvSpPr>
+            <a:spLocks noGrp="1"/>
+          </p:cNvSpPr>
+          <p:nvPr>
+            <p:ph idx="1"/>
+          </p:nvPr>
+        </p:nvSpPr>
+        <p:spPr/>
+        <p:txBody>
+          <a:bodyPr/>
+          <a:lstStyle/>
+          <a:p>
+            <a:pPr fontAlgn="t">
+              <a:lnSpc>
+                <a:spcPct val="100000"/>
+              </a:lnSpc>
+              <a:buNone/>
+            </a:pPr>
+            <a:r>
+              <a:rPr lang="ja-JP" altLang="ja-JP" b="1" dirty="0"/>
+              <a:t>Vai trò AI</a:t>
+            </a:r>
+          </a:p>
+          <a:p>
+            <a:pPr lvl="0" fontAlgn="t">
+              <a:buFont typeface="Arial" panose="020B0604020202020204" pitchFamily="34" charset="0"/>
+              <a:buChar char="•"/>
+            </a:pPr>
+            <a:r>
+              <a:rPr lang="ja-JP" altLang="ja-JP" dirty="0"/>
+              <a:t>Tạo bản nháp đầu tiên</a:t>
+            </a:r>
+          </a:p>
+          <a:p>
+            <a:pPr lvl="0" fontAlgn="t">
+              <a:buFont typeface="Arial" panose="020B0604020202020204" pitchFamily="34" charset="0"/>
+              <a:buChar char="•"/>
+            </a:pPr>
+            <a:r>
+              <a:rPr lang="ja-JP" altLang="ja-JP" dirty="0"/>
+              <a:t>Sinh mã nhanh</a:t>
+            </a:r>
+          </a:p>
+          <a:p>
+            <a:pPr fontAlgn="t">
+              <a:lnSpc>
+                <a:spcPct val="100000"/>
+              </a:lnSpc>
+              <a:buNone/>
+            </a:pPr>
+            <a:r>
+              <a:rPr lang="en-US" altLang="ja-JP" dirty="0">
+                <a:sym typeface="Wingdings" panose="05000000000000000000" pitchFamily="2" charset="2"/>
+              </a:rPr>
+              <a:t></a:t>
+            </a:r>
+            <a:r>
+              <a:rPr lang="ja-JP" altLang="ja-JP" dirty="0"/>
+              <a:t>Không phải sản phẩm cuối cùng</a:t>
+            </a:r>
+          </a:p>
+          <a:p>
+            <a:pPr fontAlgn="t">
+              <a:lnSpc>
+                <a:spcPct val="100000"/>
+              </a:lnSpc>
+              <a:buNone/>
+            </a:pPr>
+            <a:r>
+              <a:rPr lang="ja-JP" altLang="ja-JP" b="1" dirty="0"/>
+              <a:t>Sai lầm phổ biến</a:t>
+            </a:r>
+          </a:p>
+          <a:p>
+            <a:pPr fontAlgn="t">
+              <a:lnSpc>
+                <a:spcPct val="100000"/>
+              </a:lnSpc>
+              <a:buNone/>
+            </a:pPr>
+            <a:r>
+              <a:rPr lang="ja-JP" altLang="ja-JP" dirty="0"/>
+              <a:t>Code chạy được</a:t>
+            </a:r>
+          </a:p>
+          <a:p>
+            <a:pPr fontAlgn="t">
+              <a:lnSpc>
+                <a:spcPct val="100000"/>
+              </a:lnSpc>
+              <a:buNone/>
+            </a:pPr>
+            <a:r>
+              <a:rPr lang="ja-JP" altLang="ja-JP" dirty="0"/>
+              <a:t>↓</a:t>
+            </a:r>
+          </a:p>
+          <a:p>
+            <a:pPr fontAlgn="t">
+              <a:lnSpc>
+                <a:spcPct val="100000"/>
+              </a:lnSpc>
+              <a:buNone/>
+            </a:pPr>
+            <a:r>
+              <a:rPr lang="ja-JP" altLang="ja-JP" dirty="0"/>
+              <a:t>Deploy luôn</a:t>
+            </a:r>
+          </a:p>
+          <a:p>
+            <a:endParaRPr kumimoji="1" lang="ja-JP" altLang="en-US" dirty="0"/>
+          </a:p>
+        </p:txBody>
+      </p:sp>
+      <p:sp>
+        <p:nvSpPr>
+          <p:cNvPr id="4" name="Slide Number Placeholder 3">
+            <a:extLst>
+              <a:ext uri="{FF2B5EF4-FFF2-40B4-BE49-F238E27FC236}">
+                <a16:creationId xmlns:a16="http://schemas.microsoft.com/office/drawing/2014/main" id="{609A7D98-BD8D-C809-1AB9-E7C2F9E4F690}"/>
+              </a:ext>
+            </a:extLst>
+          </p:cNvPr>
+          <p:cNvSpPr>
+            <a:spLocks noGrp="1"/>
+          </p:cNvSpPr>
+          <p:nvPr>
+            <p:ph type="sldNum" sz="quarter" idx="11"/>
+          </p:nvPr>
+        </p:nvSpPr>
+        <p:spPr/>
+        <p:txBody>
+          <a:bodyPr/>
+          <a:lstStyle/>
+          <a:p>
+            <a:pPr>
+              <a:defRPr/>
+            </a:pPr>
+            <a:r>
+              <a:rPr lang="en-US" altLang="ja-JP"/>
+              <a:t>Page:</a:t>
+            </a:r>
+            <a:r>
+              <a:rPr lang="ja-JP" altLang="en-US"/>
+              <a:t> </a:t>
+            </a:r>
+            <a:fld id="{DC07468E-517B-4E9D-8840-A4568A307980}" type="slidenum">
+              <a:rPr lang="en-US" altLang="ja-JP" smtClean="0"/>
+              <a:pPr>
+                <a:defRPr/>
+              </a:pPr>
+              <a:t>14</a:t>
+            </a:fld>
+            <a:endParaRPr lang="en-US" altLang="ja-JP"/>
+          </a:p>
+        </p:txBody>
+      </p:sp>
+    </p:spTree>
+    <p:extLst>
+      <p:ext uri="{BB962C8B-B14F-4D97-AF65-F5344CB8AC3E}">
+        <p14:creationId xmlns:p14="http://schemas.microsoft.com/office/powerpoint/2010/main" val="3805508728"/>
+      </p:ext>
+    </p:extLst>
+  </p:cSld>
+  <p:clrMapOvr>
+    <a:masterClrMapping/>
+  </p:clrMapOvr>
+</p:sld>
+</file>
+
+<file path=ppt/slides/slide15.xml><?xml version="1.0" encoding="utf-8"?>
+<p:sld xmlns:a="http://schemas.openxmlformats.org/drawingml/2006/main" xmlns:r="http://schemas.openxmlformats.org/officeDocument/2006/relationships" xmlns:p="http://schemas.openxmlformats.org/presentationml/2006/main">
+  <p:cSld>
+    <p:spTree>
+      <p:nvGrpSpPr>
+        <p:cNvPr id="1" name=""/>
+        <p:cNvGrpSpPr/>
+        <p:nvPr/>
+      </p:nvGrpSpPr>
+      <p:grpSpPr>
+        <a:xfrm>
+          <a:off x="0" y="0"/>
+          <a:ext cx="0" cy="0"/>
+          <a:chOff x="0" y="0"/>
+          <a:chExt cx="0" cy="0"/>
+        </a:xfrm>
+      </p:grpSpPr>
+      <p:sp>
+        <p:nvSpPr>
+          <p:cNvPr id="2" name="Title 1">
+            <a:extLst>
+              <a:ext uri="{FF2B5EF4-FFF2-40B4-BE49-F238E27FC236}">
+                <a16:creationId xmlns:a16="http://schemas.microsoft.com/office/drawing/2014/main" id="{26D8B46B-F044-EFEE-F049-5991B6849493}"/>
+              </a:ext>
+            </a:extLst>
+          </p:cNvPr>
+          <p:cNvSpPr>
+            <a:spLocks noGrp="1"/>
+          </p:cNvSpPr>
+          <p:nvPr>
+            <p:ph type="title"/>
+          </p:nvPr>
+        </p:nvSpPr>
+        <p:spPr/>
+        <p:txBody>
+          <a:bodyPr>
+            <a:normAutofit fontScale="90000"/>
+          </a:bodyPr>
+          <a:lstStyle/>
+          <a:p>
+            <a:r>
+              <a:rPr lang="ja-JP" altLang="ja-JP" dirty="0"/>
+              <a:t>Understand</a:t>
+            </a:r>
+            <a:endParaRPr kumimoji="1" lang="ja-JP" altLang="en-US" dirty="0"/>
+          </a:p>
+        </p:txBody>
+      </p:sp>
+      <p:sp>
+        <p:nvSpPr>
+          <p:cNvPr id="3" name="Content Placeholder 2">
+            <a:extLst>
+              <a:ext uri="{FF2B5EF4-FFF2-40B4-BE49-F238E27FC236}">
+                <a16:creationId xmlns:a16="http://schemas.microsoft.com/office/drawing/2014/main" id="{3E0320C0-BAE2-4C49-C3BF-F5E167012D32}"/>
+              </a:ext>
+            </a:extLst>
+          </p:cNvPr>
+          <p:cNvSpPr>
+            <a:spLocks noGrp="1"/>
+          </p:cNvSpPr>
+          <p:nvPr>
+            <p:ph idx="1"/>
+          </p:nvPr>
+        </p:nvSpPr>
+        <p:spPr/>
+        <p:txBody>
+          <a:bodyPr/>
+          <a:lstStyle/>
+          <a:p>
+            <a:pPr fontAlgn="t">
+              <a:lnSpc>
+                <a:spcPct val="100000"/>
+              </a:lnSpc>
+              <a:buNone/>
+            </a:pPr>
+            <a:r>
+              <a:rPr lang="ja-JP" altLang="ja-JP" b="1" dirty="0"/>
+              <a:t>Trước khi dùng code</a:t>
+            </a:r>
+          </a:p>
+          <a:p>
+            <a:pPr fontAlgn="t">
+              <a:lnSpc>
+                <a:spcPct val="100000"/>
+              </a:lnSpc>
+              <a:buNone/>
+            </a:pPr>
+            <a:r>
+              <a:rPr lang="ja-JP" altLang="ja-JP" dirty="0"/>
+              <a:t>Trả lời được:</a:t>
+            </a:r>
+          </a:p>
+          <a:p>
+            <a:pPr lvl="0" fontAlgn="t">
+              <a:buFont typeface="Arial" panose="020B0604020202020204" pitchFamily="34" charset="0"/>
+              <a:buChar char="•"/>
+            </a:pPr>
+            <a:r>
+              <a:rPr lang="ja-JP" altLang="ja-JP" dirty="0"/>
+              <a:t>Code này làm gì?</a:t>
+            </a:r>
+          </a:p>
+          <a:p>
+            <a:pPr lvl="0" fontAlgn="t">
+              <a:buFont typeface="Arial" panose="020B0604020202020204" pitchFamily="34" charset="0"/>
+              <a:buChar char="•"/>
+            </a:pPr>
+            <a:r>
+              <a:rPr lang="ja-JP" altLang="ja-JP" dirty="0"/>
+              <a:t>Vì sao viết như vậy?</a:t>
+            </a:r>
+          </a:p>
+          <a:p>
+            <a:pPr lvl="0" fontAlgn="t">
+              <a:buFont typeface="Arial" panose="020B0604020202020204" pitchFamily="34" charset="0"/>
+              <a:buChar char="•"/>
+            </a:pPr>
+            <a:r>
+              <a:rPr lang="ja-JP" altLang="ja-JP" dirty="0"/>
+              <a:t>Có cách khác không?</a:t>
+            </a:r>
+          </a:p>
+          <a:p>
+            <a:pPr lvl="0" fontAlgn="t">
+              <a:buFont typeface="Arial" panose="020B0604020202020204" pitchFamily="34" charset="0"/>
+              <a:buChar char="•"/>
+            </a:pPr>
+            <a:r>
+              <a:rPr lang="ja-JP" altLang="ja-JP" dirty="0"/>
+              <a:t>Có phải best practice không?</a:t>
+            </a:r>
+          </a:p>
+          <a:p>
+            <a:endParaRPr kumimoji="1" lang="ja-JP" altLang="en-US" dirty="0"/>
+          </a:p>
+        </p:txBody>
+      </p:sp>
+      <p:sp>
+        <p:nvSpPr>
+          <p:cNvPr id="4" name="Slide Number Placeholder 3">
+            <a:extLst>
+              <a:ext uri="{FF2B5EF4-FFF2-40B4-BE49-F238E27FC236}">
+                <a16:creationId xmlns:a16="http://schemas.microsoft.com/office/drawing/2014/main" id="{EF3C36DC-BE0B-63AE-3FA0-98687D469B7F}"/>
+              </a:ext>
+            </a:extLst>
+          </p:cNvPr>
+          <p:cNvSpPr>
+            <a:spLocks noGrp="1"/>
+          </p:cNvSpPr>
+          <p:nvPr>
+            <p:ph type="sldNum" sz="quarter" idx="11"/>
+          </p:nvPr>
+        </p:nvSpPr>
+        <p:spPr/>
+        <p:txBody>
+          <a:bodyPr/>
+          <a:lstStyle/>
+          <a:p>
+            <a:pPr>
+              <a:defRPr/>
+            </a:pPr>
+            <a:r>
+              <a:rPr lang="en-US" altLang="ja-JP"/>
+              <a:t>Page:</a:t>
+            </a:r>
+            <a:r>
+              <a:rPr lang="ja-JP" altLang="en-US"/>
+              <a:t> </a:t>
+            </a:r>
+            <a:fld id="{DC07468E-517B-4E9D-8840-A4568A307980}" type="slidenum">
+              <a:rPr lang="en-US" altLang="ja-JP" smtClean="0"/>
+              <a:pPr>
+                <a:defRPr/>
+              </a:pPr>
+              <a:t>15</a:t>
+            </a:fld>
+            <a:endParaRPr lang="en-US" altLang="ja-JP"/>
+          </a:p>
+        </p:txBody>
+      </p:sp>
+    </p:spTree>
+    <p:extLst>
+      <p:ext uri="{BB962C8B-B14F-4D97-AF65-F5344CB8AC3E}">
+        <p14:creationId xmlns:p14="http://schemas.microsoft.com/office/powerpoint/2010/main" val="3841014387"/>
+      </p:ext>
+    </p:extLst>
+  </p:cSld>
+  <p:clrMapOvr>
+    <a:masterClrMapping/>
+  </p:clrMapOvr>
+</p:sld>
+</file>
+
+<file path=ppt/slides/slide16.xml><?xml version="1.0" encoding="utf-8"?>
+<p:sld xmlns:a="http://schemas.openxmlformats.org/drawingml/2006/main" xmlns:r="http://schemas.openxmlformats.org/officeDocument/2006/relationships" xmlns:p="http://schemas.openxmlformats.org/presentationml/2006/main">
+  <p:cSld>
+    <p:spTree>
+      <p:nvGrpSpPr>
+        <p:cNvPr id="1" name=""/>
+        <p:cNvGrpSpPr/>
+        <p:nvPr/>
+      </p:nvGrpSpPr>
+      <p:grpSpPr>
+        <a:xfrm>
+          <a:off x="0" y="0"/>
+          <a:ext cx="0" cy="0"/>
+          <a:chOff x="0" y="0"/>
+          <a:chExt cx="0" cy="0"/>
+        </a:xfrm>
+      </p:grpSpPr>
+      <p:sp>
+        <p:nvSpPr>
+          <p:cNvPr id="2" name="Title 1">
+            <a:extLst>
+              <a:ext uri="{FF2B5EF4-FFF2-40B4-BE49-F238E27FC236}">
+                <a16:creationId xmlns:a16="http://schemas.microsoft.com/office/drawing/2014/main" id="{47C0E6A8-B4CC-4FB1-EBBB-5EC4F4980E7D}"/>
+              </a:ext>
+            </a:extLst>
+          </p:cNvPr>
+          <p:cNvSpPr>
+            <a:spLocks noGrp="1"/>
+          </p:cNvSpPr>
+          <p:nvPr>
+            <p:ph type="title"/>
+          </p:nvPr>
+        </p:nvSpPr>
+        <p:spPr/>
+        <p:txBody>
+          <a:bodyPr>
+            <a:normAutofit fontScale="90000"/>
+          </a:bodyPr>
+          <a:lstStyle/>
+          <a:p>
+            <a:r>
+              <a:rPr lang="ja-JP" altLang="ja-JP" dirty="0"/>
+              <a:t>Verify</a:t>
+            </a:r>
+            <a:endParaRPr kumimoji="1" lang="ja-JP" altLang="en-US" dirty="0"/>
+          </a:p>
+        </p:txBody>
+      </p:sp>
+      <p:sp>
+        <p:nvSpPr>
+          <p:cNvPr id="3" name="Content Placeholder 2">
+            <a:extLst>
+              <a:ext uri="{FF2B5EF4-FFF2-40B4-BE49-F238E27FC236}">
+                <a16:creationId xmlns:a16="http://schemas.microsoft.com/office/drawing/2014/main" id="{A3C3A00D-7B3B-E627-F103-19D7EEF2246E}"/>
+              </a:ext>
+            </a:extLst>
+          </p:cNvPr>
+          <p:cNvSpPr>
+            <a:spLocks noGrp="1"/>
+          </p:cNvSpPr>
+          <p:nvPr>
+            <p:ph idx="1"/>
+          </p:nvPr>
+        </p:nvSpPr>
+        <p:spPr/>
+        <p:txBody>
+          <a:bodyPr/>
+          <a:lstStyle/>
+          <a:p>
+            <a:pPr fontAlgn="t">
+              <a:lnSpc>
+                <a:spcPct val="100000"/>
+              </a:lnSpc>
+              <a:buNone/>
+            </a:pPr>
+            <a:r>
+              <a:rPr lang="ja-JP" altLang="ja-JP" b="1" dirty="0"/>
+              <a:t>Checklist</a:t>
+            </a:r>
+          </a:p>
+          <a:p>
+            <a:pPr fontAlgn="t">
+              <a:lnSpc>
+                <a:spcPct val="100000"/>
+              </a:lnSpc>
+              <a:buNone/>
+            </a:pPr>
+            <a:r>
+              <a:rPr lang="ja-JP" altLang="ja-JP" dirty="0"/>
+              <a:t>✅ Functionality</a:t>
+            </a:r>
+          </a:p>
+          <a:p>
+            <a:pPr fontAlgn="t">
+              <a:lnSpc>
+                <a:spcPct val="100000"/>
+              </a:lnSpc>
+              <a:buNone/>
+            </a:pPr>
+            <a:r>
+              <a:rPr lang="ja-JP" altLang="ja-JP" dirty="0"/>
+              <a:t>✅ Edge Cases</a:t>
+            </a:r>
+          </a:p>
+          <a:p>
+            <a:pPr fontAlgn="t">
+              <a:lnSpc>
+                <a:spcPct val="100000"/>
+              </a:lnSpc>
+              <a:buNone/>
+            </a:pPr>
+            <a:r>
+              <a:rPr lang="ja-JP" altLang="ja-JP" dirty="0"/>
+              <a:t>✅ Exception Handling</a:t>
+            </a:r>
+          </a:p>
+          <a:p>
+            <a:pPr fontAlgn="t">
+              <a:lnSpc>
+                <a:spcPct val="100000"/>
+              </a:lnSpc>
+              <a:buNone/>
+            </a:pPr>
+            <a:r>
+              <a:rPr lang="ja-JP" altLang="ja-JP" dirty="0"/>
+              <a:t>✅ Security</a:t>
+            </a:r>
+          </a:p>
+          <a:p>
+            <a:pPr fontAlgn="t">
+              <a:lnSpc>
+                <a:spcPct val="100000"/>
+              </a:lnSpc>
+              <a:buNone/>
+            </a:pPr>
+            <a:r>
+              <a:rPr lang="ja-JP" altLang="ja-JP" dirty="0"/>
+              <a:t>✅ Performance</a:t>
+            </a:r>
+          </a:p>
+          <a:p>
+            <a:pPr fontAlgn="t">
+              <a:lnSpc>
+                <a:spcPct val="100000"/>
+              </a:lnSpc>
+              <a:buNone/>
+            </a:pPr>
+            <a:r>
+              <a:rPr lang="ja-JP" altLang="ja-JP" dirty="0"/>
+              <a:t>✅ Readability</a:t>
+            </a:r>
+          </a:p>
+          <a:p>
+            <a:endParaRPr kumimoji="1" lang="ja-JP" altLang="en-US" dirty="0"/>
+          </a:p>
+        </p:txBody>
+      </p:sp>
+      <p:sp>
+        <p:nvSpPr>
+          <p:cNvPr id="4" name="Slide Number Placeholder 3">
+            <a:extLst>
+              <a:ext uri="{FF2B5EF4-FFF2-40B4-BE49-F238E27FC236}">
+                <a16:creationId xmlns:a16="http://schemas.microsoft.com/office/drawing/2014/main" id="{7592AE2B-0938-E118-8C28-0537AF6891DC}"/>
+              </a:ext>
+            </a:extLst>
+          </p:cNvPr>
+          <p:cNvSpPr>
+            <a:spLocks noGrp="1"/>
+          </p:cNvSpPr>
+          <p:nvPr>
+            <p:ph type="sldNum" sz="quarter" idx="11"/>
+          </p:nvPr>
+        </p:nvSpPr>
+        <p:spPr/>
+        <p:txBody>
+          <a:bodyPr/>
+          <a:lstStyle/>
+          <a:p>
+            <a:pPr>
+              <a:defRPr/>
+            </a:pPr>
+            <a:r>
+              <a:rPr lang="en-US" altLang="ja-JP"/>
+              <a:t>Page:</a:t>
+            </a:r>
+            <a:r>
+              <a:rPr lang="ja-JP" altLang="en-US"/>
+              <a:t> </a:t>
+            </a:r>
+            <a:fld id="{DC07468E-517B-4E9D-8840-A4568A307980}" type="slidenum">
+              <a:rPr lang="en-US" altLang="ja-JP" smtClean="0"/>
+              <a:pPr>
+                <a:defRPr/>
+              </a:pPr>
+              <a:t>16</a:t>
+            </a:fld>
+            <a:endParaRPr lang="en-US" altLang="ja-JP"/>
+          </a:p>
+        </p:txBody>
+      </p:sp>
+    </p:spTree>
+    <p:extLst>
+      <p:ext uri="{BB962C8B-B14F-4D97-AF65-F5344CB8AC3E}">
+        <p14:creationId xmlns:p14="http://schemas.microsoft.com/office/powerpoint/2010/main" val="2020970022"/>
+      </p:ext>
+    </p:extLst>
+  </p:cSld>
+  <p:clrMapOvr>
+    <a:masterClrMapping/>
+  </p:clrMapOvr>
+</p:sld>
+</file>
+
+<file path=ppt/slides/slide17.xml><?xml version="1.0" encoding="utf-8"?>
+<p:sld xmlns:a="http://schemas.openxmlformats.org/drawingml/2006/main" xmlns:r="http://schemas.openxmlformats.org/officeDocument/2006/relationships" xmlns:p="http://schemas.openxmlformats.org/presentationml/2006/main">
+  <p:cSld>
+    <p:spTree>
+      <p:nvGrpSpPr>
+        <p:cNvPr id="1" name=""/>
+        <p:cNvGrpSpPr/>
+        <p:nvPr/>
+      </p:nvGrpSpPr>
+      <p:grpSpPr>
+        <a:xfrm>
+          <a:off x="0" y="0"/>
+          <a:ext cx="0" cy="0"/>
+          <a:chOff x="0" y="0"/>
+          <a:chExt cx="0" cy="0"/>
+        </a:xfrm>
+      </p:grpSpPr>
+      <p:sp>
+        <p:nvSpPr>
+          <p:cNvPr id="2" name="Title 1">
+            <a:extLst>
+              <a:ext uri="{FF2B5EF4-FFF2-40B4-BE49-F238E27FC236}">
+                <a16:creationId xmlns:a16="http://schemas.microsoft.com/office/drawing/2014/main" id="{7DA9053C-C1C5-EA14-3A19-0D80BB4AFF9A}"/>
+              </a:ext>
+            </a:extLst>
+          </p:cNvPr>
+          <p:cNvSpPr>
+            <a:spLocks noGrp="1"/>
+          </p:cNvSpPr>
+          <p:nvPr>
+            <p:ph type="title"/>
+          </p:nvPr>
+        </p:nvSpPr>
+        <p:spPr/>
+        <p:txBody>
+          <a:bodyPr>
+            <a:normAutofit fontScale="90000"/>
+          </a:bodyPr>
+          <a:lstStyle/>
+          <a:p>
+            <a:r>
+              <a:rPr lang="ja-JP" altLang="ja-JP" dirty="0"/>
+              <a:t>Spring Boot Big Picture</a:t>
+            </a:r>
+            <a:endParaRPr kumimoji="1" lang="ja-JP" altLang="en-US" dirty="0"/>
+          </a:p>
+        </p:txBody>
+      </p:sp>
+      <p:sp>
+        <p:nvSpPr>
+          <p:cNvPr id="3" name="Content Placeholder 2">
+            <a:extLst>
+              <a:ext uri="{FF2B5EF4-FFF2-40B4-BE49-F238E27FC236}">
+                <a16:creationId xmlns:a16="http://schemas.microsoft.com/office/drawing/2014/main" id="{29B68125-2D70-D094-D891-17E6B890B9A3}"/>
+              </a:ext>
+            </a:extLst>
+          </p:cNvPr>
+          <p:cNvSpPr>
+            <a:spLocks noGrp="1"/>
+          </p:cNvSpPr>
+          <p:nvPr>
+            <p:ph idx="1"/>
+          </p:nvPr>
+        </p:nvSpPr>
+        <p:spPr/>
+        <p:txBody>
+          <a:bodyPr/>
+          <a:lstStyle/>
+          <a:p>
+            <a:pPr lvl="0" fontAlgn="t">
+              <a:buFont typeface="Arial" panose="020B0604020202020204" pitchFamily="34" charset="0"/>
+              <a:buChar char="•"/>
+            </a:pPr>
+            <a:r>
+              <a:rPr lang="ja-JP" altLang="ja-JP" dirty="0"/>
+              <a:t>Setup môi trường</a:t>
+            </a:r>
+          </a:p>
+          <a:p>
+            <a:pPr lvl="0" fontAlgn="t">
+              <a:buFont typeface="Arial" panose="020B0604020202020204" pitchFamily="34" charset="0"/>
+              <a:buChar char="•"/>
+            </a:pPr>
+            <a:r>
+              <a:rPr lang="ja-JP" altLang="ja-JP" dirty="0"/>
+              <a:t>Generate project bằng AI</a:t>
+            </a:r>
+          </a:p>
+          <a:p>
+            <a:pPr lvl="0" fontAlgn="t">
+              <a:buFont typeface="Arial" panose="020B0604020202020204" pitchFamily="34" charset="0"/>
+              <a:buChar char="•"/>
+            </a:pPr>
+            <a:r>
+              <a:rPr lang="ja-JP" altLang="ja-JP" dirty="0"/>
+              <a:t>Hello World</a:t>
+            </a:r>
+          </a:p>
+          <a:p>
+            <a:pPr lvl="0" fontAlgn="t">
+              <a:buFont typeface="Arial" panose="020B0604020202020204" pitchFamily="34" charset="0"/>
+              <a:buChar char="•"/>
+            </a:pPr>
+            <a:r>
+              <a:rPr lang="ja-JP" altLang="ja-JP" dirty="0"/>
+              <a:t>Project Structure</a:t>
+            </a:r>
+          </a:p>
+          <a:p>
+            <a:pPr lvl="0" fontAlgn="t">
+              <a:buFont typeface="Arial" panose="020B0604020202020204" pitchFamily="34" charset="0"/>
+              <a:buChar char="•"/>
+            </a:pPr>
+            <a:r>
+              <a:rPr lang="ja-JP" altLang="ja-JP" dirty="0"/>
+              <a:t>Auto Configuration</a:t>
+            </a:r>
+          </a:p>
+          <a:p>
+            <a:pPr lvl="0" fontAlgn="t">
+              <a:buFont typeface="Arial" panose="020B0604020202020204" pitchFamily="34" charset="0"/>
+              <a:buChar char="•"/>
+            </a:pPr>
+            <a:r>
+              <a:rPr lang="ja-JP" altLang="ja-JP" dirty="0"/>
+              <a:t>Annotation cơ bản</a:t>
+            </a:r>
+          </a:p>
+          <a:p>
+            <a:endParaRPr kumimoji="1" lang="ja-JP" altLang="en-US" dirty="0"/>
+          </a:p>
+        </p:txBody>
+      </p:sp>
+      <p:sp>
+        <p:nvSpPr>
+          <p:cNvPr id="4" name="Slide Number Placeholder 3">
+            <a:extLst>
+              <a:ext uri="{FF2B5EF4-FFF2-40B4-BE49-F238E27FC236}">
+                <a16:creationId xmlns:a16="http://schemas.microsoft.com/office/drawing/2014/main" id="{E12602CD-96A7-E44A-0972-E7F46062FC2B}"/>
+              </a:ext>
+            </a:extLst>
+          </p:cNvPr>
+          <p:cNvSpPr>
+            <a:spLocks noGrp="1"/>
+          </p:cNvSpPr>
+          <p:nvPr>
+            <p:ph type="sldNum" sz="quarter" idx="11"/>
+          </p:nvPr>
+        </p:nvSpPr>
+        <p:spPr/>
+        <p:txBody>
+          <a:bodyPr/>
+          <a:lstStyle/>
+          <a:p>
+            <a:pPr>
+              <a:defRPr/>
+            </a:pPr>
+            <a:r>
+              <a:rPr lang="en-US" altLang="ja-JP"/>
+              <a:t>Page:</a:t>
+            </a:r>
+            <a:r>
+              <a:rPr lang="ja-JP" altLang="en-US"/>
+              <a:t> </a:t>
+            </a:r>
+            <a:fld id="{DC07468E-517B-4E9D-8840-A4568A307980}" type="slidenum">
+              <a:rPr lang="en-US" altLang="ja-JP" smtClean="0"/>
+              <a:pPr>
+                <a:defRPr/>
+              </a:pPr>
+              <a:t>17</a:t>
+            </a:fld>
+            <a:endParaRPr lang="en-US" altLang="ja-JP"/>
+          </a:p>
+        </p:txBody>
+      </p:sp>
+    </p:spTree>
+    <p:extLst>
+      <p:ext uri="{BB962C8B-B14F-4D97-AF65-F5344CB8AC3E}">
+        <p14:creationId xmlns:p14="http://schemas.microsoft.com/office/powerpoint/2010/main" val="3872075677"/>
+      </p:ext>
+    </p:extLst>
+  </p:cSld>
+  <p:clrMapOvr>
+    <a:masterClrMapping/>
+  </p:clrMapOvr>
+</p:sld>
+</file>
+
+<file path=ppt/slides/slide18.xml><?xml version="1.0" encoding="utf-8"?>
+<p:sld xmlns:a="http://schemas.openxmlformats.org/drawingml/2006/main" xmlns:r="http://schemas.openxmlformats.org/officeDocument/2006/relationships" xmlns:p="http://schemas.openxmlformats.org/presentationml/2006/main">
+  <p:cSld>
+    <p:spTree>
+      <p:nvGrpSpPr>
+        <p:cNvPr id="1" name=""/>
+        <p:cNvGrpSpPr/>
+        <p:nvPr/>
+      </p:nvGrpSpPr>
+      <p:grpSpPr>
+        <a:xfrm>
+          <a:off x="0" y="0"/>
+          <a:ext cx="0" cy="0"/>
+          <a:chOff x="0" y="0"/>
+          <a:chExt cx="0" cy="0"/>
+        </a:xfrm>
+      </p:grpSpPr>
+      <p:sp>
+        <p:nvSpPr>
+          <p:cNvPr id="2" name="Title 1">
+            <a:extLst>
+              <a:ext uri="{FF2B5EF4-FFF2-40B4-BE49-F238E27FC236}">
+                <a16:creationId xmlns:a16="http://schemas.microsoft.com/office/drawing/2014/main" id="{8F8D5F76-A096-F23E-9154-82A071DF587B}"/>
+              </a:ext>
+            </a:extLst>
+          </p:cNvPr>
+          <p:cNvSpPr>
+            <a:spLocks noGrp="1"/>
+          </p:cNvSpPr>
+          <p:nvPr>
+            <p:ph type="title"/>
+          </p:nvPr>
+        </p:nvSpPr>
+        <p:spPr/>
+        <p:txBody>
+          <a:bodyPr>
+            <a:normAutofit fontScale="90000"/>
+          </a:bodyPr>
+          <a:lstStyle/>
+          <a:p>
+            <a:r>
+              <a:rPr lang="ja-JP" altLang="ja-JP" dirty="0"/>
+              <a:t>Core Spring Framework</a:t>
+            </a:r>
+            <a:endParaRPr kumimoji="1" lang="ja-JP" altLang="en-US" dirty="0"/>
+          </a:p>
+        </p:txBody>
+      </p:sp>
+      <p:sp>
+        <p:nvSpPr>
+          <p:cNvPr id="3" name="Content Placeholder 2">
+            <a:extLst>
+              <a:ext uri="{FF2B5EF4-FFF2-40B4-BE49-F238E27FC236}">
+                <a16:creationId xmlns:a16="http://schemas.microsoft.com/office/drawing/2014/main" id="{7A5CB437-BB5F-D065-A005-76D84CA08DBB}"/>
+              </a:ext>
+            </a:extLst>
+          </p:cNvPr>
+          <p:cNvSpPr>
+            <a:spLocks noGrp="1"/>
+          </p:cNvSpPr>
+          <p:nvPr>
+            <p:ph idx="1"/>
+          </p:nvPr>
+        </p:nvSpPr>
+        <p:spPr/>
+        <p:txBody>
+          <a:bodyPr>
+            <a:normAutofit fontScale="85000" lnSpcReduction="20000"/>
+          </a:bodyPr>
+          <a:lstStyle/>
+          <a:p>
+            <a:pPr fontAlgn="t">
+              <a:lnSpc>
+                <a:spcPct val="100000"/>
+              </a:lnSpc>
+              <a:buNone/>
+            </a:pPr>
+            <a:r>
+              <a:rPr lang="ja-JP" altLang="ja-JP" b="1" dirty="0"/>
+              <a:t>Dependency Injection</a:t>
+            </a:r>
+          </a:p>
+          <a:p>
+            <a:pPr lvl="0" fontAlgn="t">
+              <a:buFont typeface="Arial" panose="020B0604020202020204" pitchFamily="34" charset="0"/>
+              <a:buChar char="•"/>
+            </a:pPr>
+            <a:r>
+              <a:rPr lang="ja-JP" altLang="ja-JP" dirty="0"/>
+              <a:t>IoC Container</a:t>
+            </a:r>
+          </a:p>
+          <a:p>
+            <a:pPr lvl="0" fontAlgn="t">
+              <a:buFont typeface="Arial" panose="020B0604020202020204" pitchFamily="34" charset="0"/>
+              <a:buChar char="•"/>
+            </a:pPr>
+            <a:r>
+              <a:rPr lang="ja-JP" altLang="ja-JP" dirty="0"/>
+              <a:t>Bean Management</a:t>
+            </a:r>
+          </a:p>
+          <a:p>
+            <a:pPr lvl="0" fontAlgn="t">
+              <a:buFont typeface="Arial" panose="020B0604020202020204" pitchFamily="34" charset="0"/>
+              <a:buChar char="•"/>
+            </a:pPr>
+            <a:r>
+              <a:rPr lang="ja-JP" altLang="ja-JP" dirty="0"/>
+              <a:t>Constructor Injection</a:t>
+            </a:r>
+          </a:p>
+          <a:p>
+            <a:pPr fontAlgn="t">
+              <a:lnSpc>
+                <a:spcPct val="100000"/>
+              </a:lnSpc>
+              <a:buNone/>
+            </a:pPr>
+            <a:r>
+              <a:rPr lang="ja-JP" altLang="ja-JP" b="1" dirty="0"/>
+              <a:t>Spring Data JPA</a:t>
+            </a:r>
+          </a:p>
+          <a:p>
+            <a:pPr lvl="0" fontAlgn="t">
+              <a:buFont typeface="Arial" panose="020B0604020202020204" pitchFamily="34" charset="0"/>
+              <a:buChar char="•"/>
+            </a:pPr>
+            <a:r>
+              <a:rPr lang="ja-JP" altLang="ja-JP" dirty="0"/>
+              <a:t>ORM</a:t>
+            </a:r>
+          </a:p>
+          <a:p>
+            <a:pPr lvl="0" fontAlgn="t">
+              <a:buFont typeface="Arial" panose="020B0604020202020204" pitchFamily="34" charset="0"/>
+              <a:buChar char="•"/>
+            </a:pPr>
+            <a:r>
+              <a:rPr lang="ja-JP" altLang="ja-JP" dirty="0"/>
+              <a:t>Hibernate</a:t>
+            </a:r>
+          </a:p>
+          <a:p>
+            <a:pPr lvl="0" fontAlgn="t">
+              <a:buFont typeface="Arial" panose="020B0604020202020204" pitchFamily="34" charset="0"/>
+              <a:buChar char="•"/>
+            </a:pPr>
+            <a:r>
+              <a:rPr lang="ja-JP" altLang="ja-JP" dirty="0"/>
+              <a:t>Repository Pattern</a:t>
+            </a:r>
+          </a:p>
+          <a:p>
+            <a:pPr fontAlgn="t">
+              <a:lnSpc>
+                <a:spcPct val="100000"/>
+              </a:lnSpc>
+              <a:buNone/>
+            </a:pPr>
+            <a:r>
+              <a:rPr lang="ja-JP" altLang="ja-JP" b="1" dirty="0"/>
+              <a:t>REST API</a:t>
+            </a:r>
+          </a:p>
+          <a:p>
+            <a:pPr lvl="0" fontAlgn="t">
+              <a:buFont typeface="Arial" panose="020B0604020202020204" pitchFamily="34" charset="0"/>
+              <a:buChar char="•"/>
+            </a:pPr>
+            <a:r>
+              <a:rPr lang="ja-JP" altLang="ja-JP" dirty="0"/>
+              <a:t>HTTP Methods</a:t>
+            </a:r>
+          </a:p>
+          <a:p>
+            <a:pPr lvl="0" fontAlgn="t">
+              <a:buFont typeface="Arial" panose="020B0604020202020204" pitchFamily="34" charset="0"/>
+              <a:buChar char="•"/>
+            </a:pPr>
+            <a:r>
+              <a:rPr lang="ja-JP" altLang="ja-JP" dirty="0"/>
+              <a:t>Status Codes</a:t>
+            </a:r>
+          </a:p>
+          <a:p>
+            <a:pPr lvl="0" fontAlgn="t">
+              <a:buFont typeface="Arial" panose="020B0604020202020204" pitchFamily="34" charset="0"/>
+              <a:buChar char="•"/>
+            </a:pPr>
+            <a:r>
+              <a:rPr lang="ja-JP" altLang="ja-JP" dirty="0"/>
+              <a:t>API Design</a:t>
+            </a:r>
+          </a:p>
+          <a:p>
+            <a:endParaRPr kumimoji="1" lang="ja-JP" altLang="en-US" dirty="0"/>
+          </a:p>
+        </p:txBody>
+      </p:sp>
+      <p:sp>
+        <p:nvSpPr>
+          <p:cNvPr id="4" name="Slide Number Placeholder 3">
+            <a:extLst>
+              <a:ext uri="{FF2B5EF4-FFF2-40B4-BE49-F238E27FC236}">
+                <a16:creationId xmlns:a16="http://schemas.microsoft.com/office/drawing/2014/main" id="{4E7F18FF-DAA2-ABD2-324B-6A257D7C3BF6}"/>
+              </a:ext>
+            </a:extLst>
+          </p:cNvPr>
+          <p:cNvSpPr>
+            <a:spLocks noGrp="1"/>
+          </p:cNvSpPr>
+          <p:nvPr>
+            <p:ph type="sldNum" sz="quarter" idx="11"/>
+          </p:nvPr>
+        </p:nvSpPr>
+        <p:spPr/>
+        <p:txBody>
+          <a:bodyPr/>
+          <a:lstStyle/>
+          <a:p>
+            <a:pPr>
+              <a:defRPr/>
+            </a:pPr>
+            <a:r>
+              <a:rPr lang="en-US" altLang="ja-JP"/>
+              <a:t>Page:</a:t>
+            </a:r>
+            <a:r>
+              <a:rPr lang="ja-JP" altLang="en-US"/>
+              <a:t> </a:t>
+            </a:r>
+            <a:fld id="{DC07468E-517B-4E9D-8840-A4568A307980}" type="slidenum">
+              <a:rPr lang="en-US" altLang="ja-JP" smtClean="0"/>
+              <a:pPr>
+                <a:defRPr/>
+              </a:pPr>
+              <a:t>18</a:t>
+            </a:fld>
+            <a:endParaRPr lang="en-US" altLang="ja-JP"/>
+          </a:p>
+        </p:txBody>
+      </p:sp>
+    </p:spTree>
+    <p:extLst>
+      <p:ext uri="{BB962C8B-B14F-4D97-AF65-F5344CB8AC3E}">
+        <p14:creationId xmlns:p14="http://schemas.microsoft.com/office/powerpoint/2010/main" val="1203342193"/>
+      </p:ext>
+    </p:extLst>
+  </p:cSld>
+  <p:clrMapOvr>
+    <a:masterClrMapping/>
+  </p:clrMapOvr>
+</p:sld>
+</file>
+
+<file path=ppt/slides/slide19.xml><?xml version="1.0" encoding="utf-8"?>
+<p:sld xmlns:a="http://schemas.openxmlformats.org/drawingml/2006/main" xmlns:r="http://schemas.openxmlformats.org/officeDocument/2006/relationships" xmlns:p="http://schemas.openxmlformats.org/presentationml/2006/main">
+  <p:cSld>
+    <p:spTree>
+      <p:nvGrpSpPr>
+        <p:cNvPr id="1" name=""/>
+        <p:cNvGrpSpPr/>
+        <p:nvPr/>
+      </p:nvGrpSpPr>
+      <p:grpSpPr>
+        <a:xfrm>
+          <a:off x="0" y="0"/>
+          <a:ext cx="0" cy="0"/>
+          <a:chOff x="0" y="0"/>
+          <a:chExt cx="0" cy="0"/>
+        </a:xfrm>
+      </p:grpSpPr>
+      <p:sp>
+        <p:nvSpPr>
+          <p:cNvPr id="2" name="Title 1">
+            <a:extLst>
+              <a:ext uri="{FF2B5EF4-FFF2-40B4-BE49-F238E27FC236}">
+                <a16:creationId xmlns:a16="http://schemas.microsoft.com/office/drawing/2014/main" id="{0DD70AAF-3417-07C0-5B79-FABAF9C18546}"/>
+              </a:ext>
+            </a:extLst>
+          </p:cNvPr>
+          <p:cNvSpPr>
+            <a:spLocks noGrp="1"/>
+          </p:cNvSpPr>
+          <p:nvPr>
+            <p:ph type="title"/>
+          </p:nvPr>
+        </p:nvSpPr>
+        <p:spPr/>
+        <p:txBody>
+          <a:bodyPr>
+            <a:normAutofit fontScale="90000"/>
+          </a:bodyPr>
+          <a:lstStyle/>
+          <a:p>
+            <a:r>
+              <a:rPr lang="ja-JP" altLang="ja-JP" dirty="0"/>
+              <a:t>Spring Security</a:t>
+            </a:r>
+            <a:endParaRPr kumimoji="1" lang="ja-JP" altLang="en-US" dirty="0"/>
+          </a:p>
+        </p:txBody>
+      </p:sp>
+      <p:sp>
+        <p:nvSpPr>
+          <p:cNvPr id="3" name="Content Placeholder 2">
+            <a:extLst>
+              <a:ext uri="{FF2B5EF4-FFF2-40B4-BE49-F238E27FC236}">
+                <a16:creationId xmlns:a16="http://schemas.microsoft.com/office/drawing/2014/main" id="{CC2EE95C-ABE2-C68F-5864-E3055EF49C3A}"/>
+              </a:ext>
+            </a:extLst>
+          </p:cNvPr>
+          <p:cNvSpPr>
+            <a:spLocks noGrp="1"/>
+          </p:cNvSpPr>
+          <p:nvPr>
+            <p:ph idx="1"/>
+          </p:nvPr>
+        </p:nvSpPr>
+        <p:spPr/>
+        <p:txBody>
+          <a:bodyPr/>
+          <a:lstStyle/>
+          <a:p>
+            <a:pPr lvl="0" fontAlgn="t">
+              <a:buFont typeface="Arial" panose="020B0604020202020204" pitchFamily="34" charset="0"/>
+              <a:buChar char="•"/>
+            </a:pPr>
+            <a:r>
+              <a:rPr lang="ja-JP" altLang="ja-JP" dirty="0"/>
+              <a:t>Authentication</a:t>
+            </a:r>
+          </a:p>
+          <a:p>
+            <a:pPr lvl="0" fontAlgn="t">
+              <a:buFont typeface="Arial" panose="020B0604020202020204" pitchFamily="34" charset="0"/>
+              <a:buChar char="•"/>
+            </a:pPr>
+            <a:r>
+              <a:rPr lang="ja-JP" altLang="ja-JP" dirty="0"/>
+              <a:t>Authorization</a:t>
+            </a:r>
+          </a:p>
+          <a:p>
+            <a:pPr lvl="0" fontAlgn="t">
+              <a:buFont typeface="Arial" panose="020B0604020202020204" pitchFamily="34" charset="0"/>
+              <a:buChar char="•"/>
+            </a:pPr>
+            <a:r>
+              <a:rPr lang="ja-JP" altLang="ja-JP" dirty="0"/>
+              <a:t>JWT</a:t>
+            </a:r>
+          </a:p>
+          <a:p>
+            <a:pPr lvl="0" fontAlgn="t">
+              <a:buFont typeface="Arial" panose="020B0604020202020204" pitchFamily="34" charset="0"/>
+              <a:buChar char="•"/>
+            </a:pPr>
+            <a:r>
+              <a:rPr lang="ja-JP" altLang="ja-JP" dirty="0"/>
+              <a:t>OAuth2</a:t>
+            </a:r>
+          </a:p>
+          <a:p>
+            <a:pPr lvl="0" fontAlgn="t">
+              <a:buFont typeface="Arial" panose="020B0604020202020204" pitchFamily="34" charset="0"/>
+              <a:buChar char="•"/>
+            </a:pPr>
+            <a:r>
+              <a:rPr lang="ja-JP" altLang="ja-JP" dirty="0"/>
+              <a:t>BCrypt</a:t>
+            </a:r>
+          </a:p>
+          <a:p>
+            <a:pPr lvl="0" fontAlgn="t">
+              <a:buFont typeface="Arial" panose="020B0604020202020204" pitchFamily="34" charset="0"/>
+              <a:buChar char="•"/>
+            </a:pPr>
+            <a:r>
+              <a:rPr lang="ja-JP" altLang="ja-JP" dirty="0"/>
+              <a:t>Resource Server</a:t>
+            </a:r>
+            <a:endParaRPr lang="en-US" altLang="ja-JP" dirty="0"/>
+          </a:p>
+          <a:p>
+            <a:pPr fontAlgn="t">
+              <a:lnSpc>
+                <a:spcPct val="100000"/>
+              </a:lnSpc>
+              <a:buNone/>
+            </a:pPr>
+            <a:r>
+              <a:rPr lang="ja-JP" altLang="ja-JP" b="1" dirty="0"/>
+              <a:t>Cảnh báo</a:t>
+            </a:r>
+          </a:p>
+          <a:p>
+            <a:pPr fontAlgn="t">
+              <a:lnSpc>
+                <a:spcPct val="100000"/>
+              </a:lnSpc>
+              <a:buNone/>
+            </a:pPr>
+            <a:r>
+              <a:rPr lang="ja-JP" altLang="ja-JP" dirty="0"/>
+              <a:t>Không nên phụ thuộc hoàn toàn vào AI khi code Security</a:t>
+            </a:r>
+          </a:p>
+          <a:p>
+            <a:pPr lvl="0" fontAlgn="t">
+              <a:buFont typeface="Arial" panose="020B0604020202020204" pitchFamily="34" charset="0"/>
+              <a:buChar char="•"/>
+            </a:pPr>
+            <a:endParaRPr lang="ja-JP" altLang="ja-JP" dirty="0"/>
+          </a:p>
+          <a:p>
+            <a:endParaRPr kumimoji="1" lang="ja-JP" altLang="en-US" dirty="0"/>
+          </a:p>
+        </p:txBody>
+      </p:sp>
+      <p:sp>
+        <p:nvSpPr>
+          <p:cNvPr id="4" name="Slide Number Placeholder 3">
+            <a:extLst>
+              <a:ext uri="{FF2B5EF4-FFF2-40B4-BE49-F238E27FC236}">
+                <a16:creationId xmlns:a16="http://schemas.microsoft.com/office/drawing/2014/main" id="{D13AC9BA-3A90-E856-CE29-6C52808C6E9F}"/>
+              </a:ext>
+            </a:extLst>
+          </p:cNvPr>
+          <p:cNvSpPr>
+            <a:spLocks noGrp="1"/>
+          </p:cNvSpPr>
+          <p:nvPr>
+            <p:ph type="sldNum" sz="quarter" idx="11"/>
+          </p:nvPr>
+        </p:nvSpPr>
+        <p:spPr/>
+        <p:txBody>
+          <a:bodyPr/>
+          <a:lstStyle/>
+          <a:p>
+            <a:pPr>
+              <a:defRPr/>
+            </a:pPr>
+            <a:r>
+              <a:rPr lang="en-US" altLang="ja-JP"/>
+              <a:t>Page:</a:t>
+            </a:r>
+            <a:r>
+              <a:rPr lang="ja-JP" altLang="en-US"/>
+              <a:t> </a:t>
+            </a:r>
+            <a:fld id="{DC07468E-517B-4E9D-8840-A4568A307980}" type="slidenum">
+              <a:rPr lang="en-US" altLang="ja-JP" smtClean="0"/>
+              <a:pPr>
+                <a:defRPr/>
+              </a:pPr>
+              <a:t>19</a:t>
+            </a:fld>
+            <a:endParaRPr lang="en-US" altLang="ja-JP"/>
+          </a:p>
+        </p:txBody>
+      </p:sp>
+    </p:spTree>
+    <p:extLst>
+      <p:ext uri="{BB962C8B-B14F-4D97-AF65-F5344CB8AC3E}">
+        <p14:creationId xmlns:p14="http://schemas.microsoft.com/office/powerpoint/2010/main" val="351864950"/>
+      </p:ext>
+    </p:extLst>
+  </p:cSld>
+  <p:clrMapOvr>
+    <a:masterClrMapping/>
+  </p:clrMapOvr>
+</p:sld>
+</file>
+
 <file path=ppt/slides/slide2.xml><?xml version="1.0" encoding="utf-8"?>
 <p:sld xmlns:a="http://schemas.openxmlformats.org/drawingml/2006/main" xmlns:r="http://schemas.openxmlformats.org/officeDocument/2006/relationships" xmlns:p="http://schemas.openxmlformats.org/presentationml/2006/main">
   <p:cSld>
@@ -6945,6 +8253,438 @@
     <p:extLst>
       <p:ext uri="{BB962C8B-B14F-4D97-AF65-F5344CB8AC3E}">
         <p14:creationId xmlns:p14="http://schemas.microsoft.com/office/powerpoint/2010/main" val="223843895"/>
+      </p:ext>
+    </p:extLst>
+  </p:cSld>
+  <p:clrMapOvr>
+    <a:masterClrMapping/>
+  </p:clrMapOvr>
+</p:sld>
+</file>
+
+<file path=ppt/slides/slide20.xml><?xml version="1.0" encoding="utf-8"?>
+<p:sld xmlns:a="http://schemas.openxmlformats.org/drawingml/2006/main" xmlns:r="http://schemas.openxmlformats.org/officeDocument/2006/relationships" xmlns:p="http://schemas.openxmlformats.org/presentationml/2006/main">
+  <p:cSld>
+    <p:spTree>
+      <p:nvGrpSpPr>
+        <p:cNvPr id="1" name=""/>
+        <p:cNvGrpSpPr/>
+        <p:nvPr/>
+      </p:nvGrpSpPr>
+      <p:grpSpPr>
+        <a:xfrm>
+          <a:off x="0" y="0"/>
+          <a:ext cx="0" cy="0"/>
+          <a:chOff x="0" y="0"/>
+          <a:chExt cx="0" cy="0"/>
+        </a:xfrm>
+      </p:grpSpPr>
+      <p:sp>
+        <p:nvSpPr>
+          <p:cNvPr id="2" name="Title 1">
+            <a:extLst>
+              <a:ext uri="{FF2B5EF4-FFF2-40B4-BE49-F238E27FC236}">
+                <a16:creationId xmlns:a16="http://schemas.microsoft.com/office/drawing/2014/main" id="{CB5F43D4-544C-AB76-8405-38A26A4E25B6}"/>
+              </a:ext>
+            </a:extLst>
+          </p:cNvPr>
+          <p:cNvSpPr>
+            <a:spLocks noGrp="1"/>
+          </p:cNvSpPr>
+          <p:nvPr>
+            <p:ph type="title"/>
+          </p:nvPr>
+        </p:nvSpPr>
+        <p:spPr/>
+        <p:txBody>
+          <a:bodyPr>
+            <a:normAutofit fontScale="90000"/>
+          </a:bodyPr>
+          <a:lstStyle/>
+          <a:p>
+            <a:r>
+              <a:rPr lang="ja-JP" altLang="ja-JP" dirty="0"/>
+              <a:t>Testing</a:t>
+            </a:r>
+            <a:endParaRPr kumimoji="1" lang="ja-JP" altLang="en-US" dirty="0"/>
+          </a:p>
+        </p:txBody>
+      </p:sp>
+      <p:sp>
+        <p:nvSpPr>
+          <p:cNvPr id="3" name="Content Placeholder 2">
+            <a:extLst>
+              <a:ext uri="{FF2B5EF4-FFF2-40B4-BE49-F238E27FC236}">
+                <a16:creationId xmlns:a16="http://schemas.microsoft.com/office/drawing/2014/main" id="{25773A3B-3E23-52A4-113A-6E6460D66AAC}"/>
+              </a:ext>
+            </a:extLst>
+          </p:cNvPr>
+          <p:cNvSpPr>
+            <a:spLocks noGrp="1"/>
+          </p:cNvSpPr>
+          <p:nvPr>
+            <p:ph idx="1"/>
+          </p:nvPr>
+        </p:nvSpPr>
+        <p:spPr/>
+        <p:txBody>
+          <a:bodyPr/>
+          <a:lstStyle/>
+          <a:p>
+            <a:pPr fontAlgn="t">
+              <a:lnSpc>
+                <a:spcPct val="100000"/>
+              </a:lnSpc>
+              <a:buNone/>
+            </a:pPr>
+            <a:r>
+              <a:rPr lang="ja-JP" altLang="ja-JP" b="1" dirty="0"/>
+              <a:t>Testing Mindset</a:t>
+            </a:r>
+          </a:p>
+          <a:p>
+            <a:pPr lvl="0" fontAlgn="t">
+              <a:buFont typeface="Arial" panose="020B0604020202020204" pitchFamily="34" charset="0"/>
+              <a:buChar char="•"/>
+            </a:pPr>
+            <a:r>
+              <a:rPr lang="ja-JP" altLang="ja-JP" dirty="0"/>
+              <a:t>Unit Test</a:t>
+            </a:r>
+          </a:p>
+          <a:p>
+            <a:pPr lvl="0" fontAlgn="t">
+              <a:buFont typeface="Arial" panose="020B0604020202020204" pitchFamily="34" charset="0"/>
+              <a:buChar char="•"/>
+            </a:pPr>
+            <a:r>
+              <a:rPr lang="ja-JP" altLang="ja-JP" dirty="0"/>
+              <a:t>Integration Test</a:t>
+            </a:r>
+          </a:p>
+          <a:p>
+            <a:pPr lvl="0" fontAlgn="t">
+              <a:buFont typeface="Arial" panose="020B0604020202020204" pitchFamily="34" charset="0"/>
+              <a:buChar char="•"/>
+            </a:pPr>
+            <a:r>
+              <a:rPr lang="ja-JP" altLang="ja-JP" dirty="0"/>
+              <a:t>E2E Test</a:t>
+            </a:r>
+          </a:p>
+          <a:p>
+            <a:pPr fontAlgn="t">
+              <a:lnSpc>
+                <a:spcPct val="100000"/>
+              </a:lnSpc>
+              <a:buNone/>
+            </a:pPr>
+            <a:r>
+              <a:rPr lang="ja-JP" altLang="ja-JP" b="1" dirty="0"/>
+              <a:t>Công cụ</a:t>
+            </a:r>
+          </a:p>
+          <a:p>
+            <a:pPr lvl="0" fontAlgn="t">
+              <a:buFont typeface="Arial" panose="020B0604020202020204" pitchFamily="34" charset="0"/>
+              <a:buChar char="•"/>
+            </a:pPr>
+            <a:r>
+              <a:rPr lang="ja-JP" altLang="ja-JP" dirty="0"/>
+              <a:t>JUnit</a:t>
+            </a:r>
+          </a:p>
+          <a:p>
+            <a:pPr lvl="0" fontAlgn="t">
+              <a:buFont typeface="Arial" panose="020B0604020202020204" pitchFamily="34" charset="0"/>
+              <a:buChar char="•"/>
+            </a:pPr>
+            <a:r>
+              <a:rPr lang="ja-JP" altLang="ja-JP" dirty="0"/>
+              <a:t>Mockito</a:t>
+            </a:r>
+          </a:p>
+          <a:p>
+            <a:pPr lvl="0" fontAlgn="t">
+              <a:buFont typeface="Arial" panose="020B0604020202020204" pitchFamily="34" charset="0"/>
+              <a:buChar char="•"/>
+            </a:pPr>
+            <a:r>
+              <a:rPr lang="ja-JP" altLang="ja-JP" dirty="0"/>
+              <a:t>Spring Test</a:t>
+            </a:r>
+          </a:p>
+          <a:p>
+            <a:endParaRPr kumimoji="1" lang="ja-JP" altLang="en-US" dirty="0"/>
+          </a:p>
+        </p:txBody>
+      </p:sp>
+      <p:sp>
+        <p:nvSpPr>
+          <p:cNvPr id="4" name="Slide Number Placeholder 3">
+            <a:extLst>
+              <a:ext uri="{FF2B5EF4-FFF2-40B4-BE49-F238E27FC236}">
+                <a16:creationId xmlns:a16="http://schemas.microsoft.com/office/drawing/2014/main" id="{8EE34B46-91C9-AFD7-AEBA-27093A268EDB}"/>
+              </a:ext>
+            </a:extLst>
+          </p:cNvPr>
+          <p:cNvSpPr>
+            <a:spLocks noGrp="1"/>
+          </p:cNvSpPr>
+          <p:nvPr>
+            <p:ph type="sldNum" sz="quarter" idx="11"/>
+          </p:nvPr>
+        </p:nvSpPr>
+        <p:spPr/>
+        <p:txBody>
+          <a:bodyPr/>
+          <a:lstStyle/>
+          <a:p>
+            <a:pPr>
+              <a:defRPr/>
+            </a:pPr>
+            <a:r>
+              <a:rPr lang="en-US" altLang="ja-JP"/>
+              <a:t>Page:</a:t>
+            </a:r>
+            <a:r>
+              <a:rPr lang="ja-JP" altLang="en-US"/>
+              <a:t> </a:t>
+            </a:r>
+            <a:fld id="{DC07468E-517B-4E9D-8840-A4568A307980}" type="slidenum">
+              <a:rPr lang="en-US" altLang="ja-JP" smtClean="0"/>
+              <a:pPr>
+                <a:defRPr/>
+              </a:pPr>
+              <a:t>20</a:t>
+            </a:fld>
+            <a:endParaRPr lang="en-US" altLang="ja-JP"/>
+          </a:p>
+        </p:txBody>
+      </p:sp>
+    </p:spTree>
+    <p:extLst>
+      <p:ext uri="{BB962C8B-B14F-4D97-AF65-F5344CB8AC3E}">
+        <p14:creationId xmlns:p14="http://schemas.microsoft.com/office/powerpoint/2010/main" val="1542439948"/>
+      </p:ext>
+    </p:extLst>
+  </p:cSld>
+  <p:clrMapOvr>
+    <a:masterClrMapping/>
+  </p:clrMapOvr>
+</p:sld>
+</file>
+
+<file path=ppt/slides/slide21.xml><?xml version="1.0" encoding="utf-8"?>
+<p:sld xmlns:a="http://schemas.openxmlformats.org/drawingml/2006/main" xmlns:r="http://schemas.openxmlformats.org/officeDocument/2006/relationships" xmlns:p="http://schemas.openxmlformats.org/presentationml/2006/main">
+  <p:cSld>
+    <p:spTree>
+      <p:nvGrpSpPr>
+        <p:cNvPr id="1" name=""/>
+        <p:cNvGrpSpPr/>
+        <p:nvPr/>
+      </p:nvGrpSpPr>
+      <p:grpSpPr>
+        <a:xfrm>
+          <a:off x="0" y="0"/>
+          <a:ext cx="0" cy="0"/>
+          <a:chOff x="0" y="0"/>
+          <a:chExt cx="0" cy="0"/>
+        </a:xfrm>
+      </p:grpSpPr>
+      <p:sp>
+        <p:nvSpPr>
+          <p:cNvPr id="2" name="Title 1">
+            <a:extLst>
+              <a:ext uri="{FF2B5EF4-FFF2-40B4-BE49-F238E27FC236}">
+                <a16:creationId xmlns:a16="http://schemas.microsoft.com/office/drawing/2014/main" id="{9490CA90-EE2C-CAB0-A657-EBBED7489C8B}"/>
+              </a:ext>
+            </a:extLst>
+          </p:cNvPr>
+          <p:cNvSpPr>
+            <a:spLocks noGrp="1"/>
+          </p:cNvSpPr>
+          <p:nvPr>
+            <p:ph type="title"/>
+          </p:nvPr>
+        </p:nvSpPr>
+        <p:spPr/>
+        <p:txBody>
+          <a:bodyPr>
+            <a:normAutofit fontScale="90000"/>
+          </a:bodyPr>
+          <a:lstStyle/>
+          <a:p>
+            <a:r>
+              <a:rPr lang="ja-JP" altLang="ja-JP" dirty="0"/>
+              <a:t>HR Management System</a:t>
+            </a:r>
+            <a:endParaRPr kumimoji="1" lang="ja-JP" altLang="en-US" dirty="0"/>
+          </a:p>
+        </p:txBody>
+      </p:sp>
+      <p:sp>
+        <p:nvSpPr>
+          <p:cNvPr id="3" name="Content Placeholder 2">
+            <a:extLst>
+              <a:ext uri="{FF2B5EF4-FFF2-40B4-BE49-F238E27FC236}">
+                <a16:creationId xmlns:a16="http://schemas.microsoft.com/office/drawing/2014/main" id="{E50A7B40-5D49-90EA-2959-88B859FA83FC}"/>
+              </a:ext>
+            </a:extLst>
+          </p:cNvPr>
+          <p:cNvSpPr>
+            <a:spLocks noGrp="1"/>
+          </p:cNvSpPr>
+          <p:nvPr>
+            <p:ph idx="1"/>
+          </p:nvPr>
+        </p:nvSpPr>
+        <p:spPr/>
+        <p:txBody>
+          <a:bodyPr/>
+          <a:lstStyle/>
+          <a:p>
+            <a:pPr lvl="0" fontAlgn="t">
+              <a:buFont typeface="Arial" panose="020B0604020202020204" pitchFamily="34" charset="0"/>
+              <a:buChar char="•"/>
+            </a:pPr>
+            <a:r>
+              <a:rPr lang="ja-JP" altLang="ja-JP" dirty="0"/>
+              <a:t>Company CRUD</a:t>
+            </a:r>
+          </a:p>
+          <a:p>
+            <a:pPr lvl="0" fontAlgn="t">
+              <a:buFont typeface="Arial" panose="020B0604020202020204" pitchFamily="34" charset="0"/>
+              <a:buChar char="•"/>
+            </a:pPr>
+            <a:r>
+              <a:rPr lang="ja-JP" altLang="ja-JP" dirty="0"/>
+              <a:t>Permission CRUD</a:t>
+            </a:r>
+          </a:p>
+          <a:p>
+            <a:pPr lvl="0" fontAlgn="t">
+              <a:buFont typeface="Arial" panose="020B0604020202020204" pitchFamily="34" charset="0"/>
+              <a:buChar char="•"/>
+            </a:pPr>
+            <a:r>
+              <a:rPr lang="ja-JP" altLang="ja-JP" dirty="0"/>
+              <a:t>Role CRUD</a:t>
+            </a:r>
+          </a:p>
+          <a:p>
+            <a:pPr lvl="0" fontAlgn="t">
+              <a:buFont typeface="Arial" panose="020B0604020202020204" pitchFamily="34" charset="0"/>
+              <a:buChar char="•"/>
+            </a:pPr>
+            <a:r>
+              <a:rPr lang="ja-JP" altLang="ja-JP" dirty="0"/>
+              <a:t>User CRUD</a:t>
+            </a:r>
+          </a:p>
+          <a:p>
+            <a:pPr lvl="0" fontAlgn="t">
+              <a:buFont typeface="Arial" panose="020B0604020202020204" pitchFamily="34" charset="0"/>
+              <a:buChar char="•"/>
+            </a:pPr>
+            <a:r>
+              <a:rPr lang="ja-JP" altLang="ja-JP" dirty="0"/>
+              <a:t>Upload Avatar</a:t>
+            </a:r>
+          </a:p>
+          <a:p>
+            <a:pPr lvl="0" fontAlgn="t">
+              <a:buFont typeface="Arial" panose="020B0604020202020204" pitchFamily="34" charset="0"/>
+              <a:buChar char="•"/>
+            </a:pPr>
+            <a:r>
+              <a:rPr lang="ja-JP" altLang="ja-JP" dirty="0"/>
+              <a:t>JWT Login</a:t>
+            </a:r>
+          </a:p>
+          <a:p>
+            <a:pPr lvl="0" fontAlgn="t">
+              <a:buFont typeface="Arial" panose="020B0604020202020204" pitchFamily="34" charset="0"/>
+              <a:buChar char="•"/>
+            </a:pPr>
+            <a:r>
+              <a:rPr lang="ja-JP" altLang="ja-JP" dirty="0"/>
+              <a:t>Refresh Token</a:t>
+            </a:r>
+          </a:p>
+          <a:p>
+            <a:pPr lvl="0" fontAlgn="t">
+              <a:buFont typeface="Arial" panose="020B0604020202020204" pitchFamily="34" charset="0"/>
+              <a:buChar char="•"/>
+            </a:pPr>
+            <a:r>
+              <a:rPr lang="ja-JP" altLang="ja-JP" dirty="0"/>
+              <a:t>RBAC</a:t>
+            </a:r>
+          </a:p>
+          <a:p>
+            <a:pPr lvl="0" fontAlgn="t">
+              <a:buFont typeface="Arial" panose="020B0604020202020204" pitchFamily="34" charset="0"/>
+              <a:buChar char="•"/>
+            </a:pPr>
+            <a:r>
+              <a:rPr lang="ja-JP" altLang="ja-JP" dirty="0"/>
+              <a:t>Search &amp; Filter</a:t>
+            </a:r>
+          </a:p>
+          <a:p>
+            <a:endParaRPr kumimoji="1" lang="ja-JP" altLang="en-US" dirty="0"/>
+          </a:p>
+        </p:txBody>
+      </p:sp>
+      <p:sp>
+        <p:nvSpPr>
+          <p:cNvPr id="4" name="Slide Number Placeholder 3">
+            <a:extLst>
+              <a:ext uri="{FF2B5EF4-FFF2-40B4-BE49-F238E27FC236}">
+                <a16:creationId xmlns:a16="http://schemas.microsoft.com/office/drawing/2014/main" id="{830ADB62-B2BD-4D6D-6F41-852F6ED102CF}"/>
+              </a:ext>
+            </a:extLst>
+          </p:cNvPr>
+          <p:cNvSpPr>
+            <a:spLocks noGrp="1"/>
+          </p:cNvSpPr>
+          <p:nvPr>
+            <p:ph type="sldNum" sz="quarter" idx="11"/>
+          </p:nvPr>
+        </p:nvSpPr>
+        <p:spPr/>
+        <p:txBody>
+          <a:bodyPr/>
+          <a:lstStyle/>
+          <a:p>
+            <a:pPr>
+              <a:defRPr/>
+            </a:pPr>
+            <a:r>
+              <a:rPr lang="en-US" altLang="ja-JP"/>
+              <a:t>Page:</a:t>
+            </a:r>
+            <a:r>
+              <a:rPr lang="ja-JP" altLang="en-US"/>
+              <a:t> </a:t>
+            </a:r>
+            <a:fld id="{DC07468E-517B-4E9D-8840-A4568A307980}" type="slidenum">
+              <a:rPr lang="en-US" altLang="ja-JP" smtClean="0"/>
+              <a:pPr>
+                <a:defRPr/>
+              </a:pPr>
+              <a:t>21</a:t>
+            </a:fld>
+            <a:endParaRPr lang="en-US" altLang="ja-JP"/>
+          </a:p>
+        </p:txBody>
+      </p:sp>
+    </p:spTree>
+    <p:extLst>
+      <p:ext uri="{BB962C8B-B14F-4D97-AF65-F5344CB8AC3E}">
+        <p14:creationId xmlns:p14="http://schemas.microsoft.com/office/powerpoint/2010/main" val="2596953559"/>
       </p:ext>
     </p:extLst>
   </p:cSld>
